--- a/docs/Privacy Shield.pptx
+++ b/docs/Privacy Shield.pptx
@@ -5,10 +5,10 @@
     <p:sldMasterId id="2147483658" r:id="rId4"/>
   </p:sldMasterIdLst>
   <p:notesMasterIdLst>
-    <p:notesMasterId r:id="rId13"/>
+    <p:notesMasterId r:id="rId15"/>
   </p:notesMasterIdLst>
   <p:handoutMasterIdLst>
-    <p:handoutMasterId r:id="rId14"/>
+    <p:handoutMasterId r:id="rId16"/>
   </p:handoutMasterIdLst>
   <p:sldIdLst>
     <p:sldId id="410" r:id="rId5"/>
@@ -17,8 +17,10 @@
     <p:sldId id="408" r:id="rId8"/>
     <p:sldId id="411" r:id="rId9"/>
     <p:sldId id="412" r:id="rId10"/>
-    <p:sldId id="406" r:id="rId11"/>
-    <p:sldId id="398" r:id="rId12"/>
+    <p:sldId id="414" r:id="rId11"/>
+    <p:sldId id="415" r:id="rId12"/>
+    <p:sldId id="406" r:id="rId13"/>
+    <p:sldId id="398" r:id="rId14"/>
   </p:sldIdLst>
   <p:sldSz cx="12192000" cy="6858000"/>
   <p:notesSz cx="6858000" cy="9144000"/>
@@ -789,6 +791,100 @@
 </p:notes>
 </file>
 
+<file path=ppt/notesSlides/notesSlide10.xml><?xml version="1.0" encoding="utf-8"?>
+<p:notes xmlns:a="http://schemas.openxmlformats.org/drawingml/2006/main" xmlns:r="http://schemas.openxmlformats.org/officeDocument/2006/relationships" xmlns:p="http://schemas.openxmlformats.org/presentationml/2006/main">
+  <p:cSld>
+    <p:spTree>
+      <p:nvGrpSpPr>
+        <p:cNvPr id="1" name=""/>
+        <p:cNvGrpSpPr/>
+        <p:nvPr/>
+      </p:nvGrpSpPr>
+      <p:grpSpPr>
+        <a:xfrm>
+          <a:off x="0" y="0"/>
+          <a:ext cx="0" cy="0"/>
+          <a:chOff x="0" y="0"/>
+          <a:chExt cx="0" cy="0"/>
+        </a:xfrm>
+      </p:grpSpPr>
+      <p:sp>
+        <p:nvSpPr>
+          <p:cNvPr id="2" name="Segnaposto immagine diapositiva 1"/>
+          <p:cNvSpPr>
+            <a:spLocks noGrp="1" noRot="1" noChangeAspect="1"/>
+          </p:cNvSpPr>
+          <p:nvPr>
+            <p:ph type="sldImg"/>
+          </p:nvPr>
+        </p:nvSpPr>
+        <p:spPr/>
+      </p:sp>
+      <p:sp>
+        <p:nvSpPr>
+          <p:cNvPr id="3" name="Segnaposto note 2"/>
+          <p:cNvSpPr>
+            <a:spLocks noGrp="1"/>
+          </p:cNvSpPr>
+          <p:nvPr>
+            <p:ph type="body" idx="1"/>
+          </p:nvPr>
+        </p:nvSpPr>
+        <p:spPr/>
+        <p:txBody>
+          <a:bodyPr rtlCol="0"/>
+          <a:lstStyle>
+            <a:defPPr>
+              <a:defRPr lang="it-IT"/>
+            </a:defPPr>
+          </a:lstStyle>
+          <a:p>
+            <a:pPr rtl="0"/>
+            <a:endParaRPr lang="it-IT" dirty="0"/>
+          </a:p>
+        </p:txBody>
+      </p:sp>
+      <p:sp>
+        <p:nvSpPr>
+          <p:cNvPr id="4" name="Segnaposto numero diapositiva 3"/>
+          <p:cNvSpPr>
+            <a:spLocks noGrp="1"/>
+          </p:cNvSpPr>
+          <p:nvPr>
+            <p:ph type="sldNum" sz="quarter" idx="5"/>
+          </p:nvPr>
+        </p:nvSpPr>
+        <p:spPr/>
+        <p:txBody>
+          <a:bodyPr rtlCol="0"/>
+          <a:lstStyle>
+            <a:defPPr>
+              <a:defRPr lang="it-IT"/>
+            </a:defPPr>
+          </a:lstStyle>
+          <a:p>
+            <a:pPr rtl="0"/>
+            <a:fld id="{A89C7E07-3C67-C64C-8DA0-0404F6303970}" type="slidenum">
+              <a:rPr lang="it-IT" smtClean="0"/>
+              <a:t>10</a:t>
+            </a:fld>
+            <a:endParaRPr lang="it-IT" dirty="0"/>
+          </a:p>
+        </p:txBody>
+      </p:sp>
+    </p:spTree>
+    <p:extLst>
+      <p:ext uri="{BB962C8B-B14F-4D97-AF65-F5344CB8AC3E}">
+        <p14:creationId xmlns:p14="http://schemas.microsoft.com/office/powerpoint/2010/main" val="1765923172"/>
+      </p:ext>
+    </p:extLst>
+  </p:cSld>
+  <p:clrMapOvr>
+    <a:masterClrMapping/>
+  </p:clrMapOvr>
+</p:notes>
+</file>
+
 <file path=ppt/notesSlides/notesSlide2.xml><?xml version="1.0" encoding="utf-8"?>
 <p:notes xmlns:a="http://schemas.openxmlformats.org/drawingml/2006/main" xmlns:r="http://schemas.openxmlformats.org/officeDocument/2006/relationships" xmlns:p="http://schemas.openxmlformats.org/presentationml/2006/main">
   <p:cSld>
@@ -1312,7 +1408,13 @@
   <p:cSld>
     <p:spTree>
       <p:nvGrpSpPr>
-        <p:cNvPr id="1" name=""/>
+        <p:cNvPr id="1" name="">
+          <a:extLst>
+            <a:ext uri="{FF2B5EF4-FFF2-40B4-BE49-F238E27FC236}">
+              <a16:creationId xmlns:a16="http://schemas.microsoft.com/office/drawing/2014/main" id="{4F2381D5-A8F5-A5EA-85A2-FCADFDAE2FEB}"/>
+            </a:ext>
+          </a:extLst>
+        </p:cNvPr>
         <p:cNvGrpSpPr/>
         <p:nvPr/>
       </p:nvGrpSpPr>
@@ -1326,7 +1428,13 @@
       </p:grpSpPr>
       <p:sp>
         <p:nvSpPr>
-          <p:cNvPr id="2" name="Segnaposto immagine diapositiva 1"/>
+          <p:cNvPr id="2" name="Segnaposto immagine diapositiva 1">
+            <a:extLst>
+              <a:ext uri="{FF2B5EF4-FFF2-40B4-BE49-F238E27FC236}">
+                <a16:creationId xmlns:a16="http://schemas.microsoft.com/office/drawing/2014/main" id="{E41A9DA3-8747-327E-2D58-BEC55F670005}"/>
+              </a:ext>
+            </a:extLst>
+          </p:cNvPr>
           <p:cNvSpPr>
             <a:spLocks noGrp="1" noRot="1" noChangeAspect="1"/>
           </p:cNvSpPr>
@@ -1338,7 +1446,13 @@
       </p:sp>
       <p:sp>
         <p:nvSpPr>
-          <p:cNvPr id="3" name="Segnaposto note 2"/>
+          <p:cNvPr id="3" name="Segnaposto note 2">
+            <a:extLst>
+              <a:ext uri="{FF2B5EF4-FFF2-40B4-BE49-F238E27FC236}">
+                <a16:creationId xmlns:a16="http://schemas.microsoft.com/office/drawing/2014/main" id="{82F1AAB1-3E45-0791-398C-74E78ABAD1BD}"/>
+              </a:ext>
+            </a:extLst>
+          </p:cNvPr>
           <p:cNvSpPr>
             <a:spLocks noGrp="1"/>
           </p:cNvSpPr>
@@ -1362,7 +1476,13 @@
       </p:sp>
       <p:sp>
         <p:nvSpPr>
-          <p:cNvPr id="4" name="Segnaposto numero diapositiva 3"/>
+          <p:cNvPr id="4" name="Segnaposto numero diapositiva 3">
+            <a:extLst>
+              <a:ext uri="{FF2B5EF4-FFF2-40B4-BE49-F238E27FC236}">
+                <a16:creationId xmlns:a16="http://schemas.microsoft.com/office/drawing/2014/main" id="{209FACAA-75D4-B403-9520-3AB41E4FA879}"/>
+              </a:ext>
+            </a:extLst>
+          </p:cNvPr>
           <p:cNvSpPr>
             <a:spLocks noGrp="1"/>
           </p:cNvSpPr>
@@ -1391,7 +1511,7 @@
     </p:spTree>
     <p:extLst>
       <p:ext uri="{BB962C8B-B14F-4D97-AF65-F5344CB8AC3E}">
-        <p14:creationId xmlns:p14="http://schemas.microsoft.com/office/powerpoint/2010/main" val="2994759380"/>
+        <p14:creationId xmlns:p14="http://schemas.microsoft.com/office/powerpoint/2010/main" val="2350893409"/>
       </p:ext>
     </p:extLst>
   </p:cSld>
@@ -1402,6 +1522,124 @@
 </file>
 
 <file path=ppt/notesSlides/notesSlide8.xml><?xml version="1.0" encoding="utf-8"?>
+<p:notes xmlns:a="http://schemas.openxmlformats.org/drawingml/2006/main" xmlns:r="http://schemas.openxmlformats.org/officeDocument/2006/relationships" xmlns:p="http://schemas.openxmlformats.org/presentationml/2006/main">
+  <p:cSld>
+    <p:spTree>
+      <p:nvGrpSpPr>
+        <p:cNvPr id="1" name="">
+          <a:extLst>
+            <a:ext uri="{FF2B5EF4-FFF2-40B4-BE49-F238E27FC236}">
+              <a16:creationId xmlns:a16="http://schemas.microsoft.com/office/drawing/2014/main" id="{216C28AB-4B01-93B8-F6B5-DB4E9EFAE67B}"/>
+            </a:ext>
+          </a:extLst>
+        </p:cNvPr>
+        <p:cNvGrpSpPr/>
+        <p:nvPr/>
+      </p:nvGrpSpPr>
+      <p:grpSpPr>
+        <a:xfrm>
+          <a:off x="0" y="0"/>
+          <a:ext cx="0" cy="0"/>
+          <a:chOff x="0" y="0"/>
+          <a:chExt cx="0" cy="0"/>
+        </a:xfrm>
+      </p:grpSpPr>
+      <p:sp>
+        <p:nvSpPr>
+          <p:cNvPr id="2" name="Segnaposto immagine diapositiva 1">
+            <a:extLst>
+              <a:ext uri="{FF2B5EF4-FFF2-40B4-BE49-F238E27FC236}">
+                <a16:creationId xmlns:a16="http://schemas.microsoft.com/office/drawing/2014/main" id="{29E1F32F-CA02-CE6B-7A78-C0072896C299}"/>
+              </a:ext>
+            </a:extLst>
+          </p:cNvPr>
+          <p:cNvSpPr>
+            <a:spLocks noGrp="1" noRot="1" noChangeAspect="1"/>
+          </p:cNvSpPr>
+          <p:nvPr>
+            <p:ph type="sldImg"/>
+          </p:nvPr>
+        </p:nvSpPr>
+        <p:spPr/>
+      </p:sp>
+      <p:sp>
+        <p:nvSpPr>
+          <p:cNvPr id="3" name="Segnaposto note 2">
+            <a:extLst>
+              <a:ext uri="{FF2B5EF4-FFF2-40B4-BE49-F238E27FC236}">
+                <a16:creationId xmlns:a16="http://schemas.microsoft.com/office/drawing/2014/main" id="{B69502F6-CA72-23FF-58B6-5C4ED2D621C2}"/>
+              </a:ext>
+            </a:extLst>
+          </p:cNvPr>
+          <p:cNvSpPr>
+            <a:spLocks noGrp="1"/>
+          </p:cNvSpPr>
+          <p:nvPr>
+            <p:ph type="body" idx="1"/>
+          </p:nvPr>
+        </p:nvSpPr>
+        <p:spPr/>
+        <p:txBody>
+          <a:bodyPr rtlCol="0"/>
+          <a:lstStyle>
+            <a:defPPr>
+              <a:defRPr lang="it-IT"/>
+            </a:defPPr>
+          </a:lstStyle>
+          <a:p>
+            <a:pPr rtl="0"/>
+            <a:endParaRPr lang="it-IT" dirty="0"/>
+          </a:p>
+        </p:txBody>
+      </p:sp>
+      <p:sp>
+        <p:nvSpPr>
+          <p:cNvPr id="4" name="Segnaposto numero diapositiva 3">
+            <a:extLst>
+              <a:ext uri="{FF2B5EF4-FFF2-40B4-BE49-F238E27FC236}">
+                <a16:creationId xmlns:a16="http://schemas.microsoft.com/office/drawing/2014/main" id="{223E1AA8-46C9-476D-CC2B-0A75E32C3CC7}"/>
+              </a:ext>
+            </a:extLst>
+          </p:cNvPr>
+          <p:cNvSpPr>
+            <a:spLocks noGrp="1"/>
+          </p:cNvSpPr>
+          <p:nvPr>
+            <p:ph type="sldNum" sz="quarter" idx="5"/>
+          </p:nvPr>
+        </p:nvSpPr>
+        <p:spPr/>
+        <p:txBody>
+          <a:bodyPr rtlCol="0"/>
+          <a:lstStyle>
+            <a:defPPr>
+              <a:defRPr lang="it-IT"/>
+            </a:defPPr>
+          </a:lstStyle>
+          <a:p>
+            <a:pPr rtl="0"/>
+            <a:fld id="{A89C7E07-3C67-C64C-8DA0-0404F6303970}" type="slidenum">
+              <a:rPr lang="it-IT" smtClean="0"/>
+              <a:t>8</a:t>
+            </a:fld>
+            <a:endParaRPr lang="it-IT" dirty="0"/>
+          </a:p>
+        </p:txBody>
+      </p:sp>
+    </p:spTree>
+    <p:extLst>
+      <p:ext uri="{BB962C8B-B14F-4D97-AF65-F5344CB8AC3E}">
+        <p14:creationId xmlns:p14="http://schemas.microsoft.com/office/powerpoint/2010/main" val="657569009"/>
+      </p:ext>
+    </p:extLst>
+  </p:cSld>
+  <p:clrMapOvr>
+    <a:masterClrMapping/>
+  </p:clrMapOvr>
+</p:notes>
+</file>
+
+<file path=ppt/notesSlides/notesSlide9.xml><?xml version="1.0" encoding="utf-8"?>
 <p:notes xmlns:a="http://schemas.openxmlformats.org/drawingml/2006/main" xmlns:r="http://schemas.openxmlformats.org/officeDocument/2006/relationships" xmlns:p="http://schemas.openxmlformats.org/presentationml/2006/main">
   <p:cSld>
     <p:spTree>
@@ -1476,7 +1714,7 @@
             <a:pPr rtl="0"/>
             <a:fld id="{A89C7E07-3C67-C64C-8DA0-0404F6303970}" type="slidenum">
               <a:rPr lang="it-IT" smtClean="0"/>
-              <a:t>8</a:t>
+              <a:t>9</a:t>
             </a:fld>
             <a:endParaRPr lang="it-IT" dirty="0"/>
           </a:p>
@@ -1485,7 +1723,7 @@
     </p:spTree>
     <p:extLst>
       <p:ext uri="{BB962C8B-B14F-4D97-AF65-F5344CB8AC3E}">
-        <p14:creationId xmlns:p14="http://schemas.microsoft.com/office/powerpoint/2010/main" val="1765923172"/>
+        <p14:creationId xmlns:p14="http://schemas.microsoft.com/office/powerpoint/2010/main" val="2994759380"/>
       </p:ext>
     </p:extLst>
   </p:cSld>
@@ -10125,6 +10363,95 @@
 </p:sld>
 </file>
 
+<file path=ppt/slides/slide10.xml><?xml version="1.0" encoding="utf-8"?>
+<p:sld xmlns:a="http://schemas.openxmlformats.org/drawingml/2006/main" xmlns:r="http://schemas.openxmlformats.org/officeDocument/2006/relationships" xmlns:p="http://schemas.openxmlformats.org/presentationml/2006/main">
+  <p:cSld>
+    <p:spTree>
+      <p:nvGrpSpPr>
+        <p:cNvPr id="1" name=""/>
+        <p:cNvGrpSpPr/>
+        <p:nvPr/>
+      </p:nvGrpSpPr>
+      <p:grpSpPr>
+        <a:xfrm>
+          <a:off x="0" y="0"/>
+          <a:ext cx="0" cy="0"/>
+          <a:chOff x="0" y="0"/>
+          <a:chExt cx="0" cy="0"/>
+        </a:xfrm>
+      </p:grpSpPr>
+      <p:sp>
+        <p:nvSpPr>
+          <p:cNvPr id="2" name="Titolo 1">
+            <a:extLst>
+              <a:ext uri="{FF2B5EF4-FFF2-40B4-BE49-F238E27FC236}">
+                <a16:creationId xmlns:a16="http://schemas.microsoft.com/office/drawing/2014/main" id="{F810C1B7-6E4E-3DEE-50C0-1CA3B14303EE}"/>
+              </a:ext>
+            </a:extLst>
+          </p:cNvPr>
+          <p:cNvSpPr>
+            <a:spLocks noGrp="1"/>
+          </p:cNvSpPr>
+          <p:nvPr>
+            <p:ph type="ctrTitle"/>
+          </p:nvPr>
+        </p:nvSpPr>
+        <p:spPr>
+          <a:xfrm>
+            <a:off x="594360" y="411479"/>
+            <a:ext cx="5486400" cy="3291840"/>
+          </a:xfrm>
+        </p:spPr>
+        <p:txBody>
+          <a:bodyPr rtlCol="0"/>
+          <a:lstStyle>
+            <a:defPPr>
+              <a:defRPr lang="it-IT"/>
+            </a:defPPr>
+          </a:lstStyle>
+          <a:p>
+            <a:pPr rtl="0"/>
+            <a:r>
+              <a:rPr lang="it-IT" dirty="0"/>
+              <a:t>Thank </a:t>
+            </a:r>
+            <a:r>
+              <a:rPr lang="it-IT" dirty="0" err="1"/>
+              <a:t>you</a:t>
+            </a:r>
+            <a:r>
+              <a:rPr lang="it-IT" dirty="0"/>
+              <a:t> for </a:t>
+            </a:r>
+            <a:r>
+              <a:rPr lang="it-IT" dirty="0" err="1"/>
+              <a:t>your</a:t>
+            </a:r>
+            <a:r>
+              <a:rPr lang="it-IT" dirty="0"/>
+              <a:t> </a:t>
+            </a:r>
+            <a:r>
+              <a:rPr lang="it-IT" dirty="0" err="1"/>
+              <a:t>attention</a:t>
+            </a:r>
+            <a:endParaRPr lang="it-IT" dirty="0"/>
+          </a:p>
+        </p:txBody>
+      </p:sp>
+    </p:spTree>
+    <p:extLst>
+      <p:ext uri="{BB962C8B-B14F-4D97-AF65-F5344CB8AC3E}">
+        <p14:creationId xmlns:p14="http://schemas.microsoft.com/office/powerpoint/2010/main" val="4261132419"/>
+      </p:ext>
+    </p:extLst>
+  </p:cSld>
+  <p:clrMapOvr>
+    <a:masterClrMapping/>
+  </p:clrMapOvr>
+</p:sld>
+</file>
+
 <file path=ppt/slides/slide2.xml><?xml version="1.0" encoding="utf-8"?>
 <p:sld xmlns:a="http://schemas.openxmlformats.org/drawingml/2006/main" xmlns:r="http://schemas.openxmlformats.org/officeDocument/2006/relationships" xmlns:p="http://schemas.openxmlformats.org/presentationml/2006/main">
   <p:cSld>
@@ -11052,14 +11379,9 @@
             </a:defPPr>
           </a:lstStyle>
           <a:p>
-            <a:pPr rtl="0"/>
-            <a:r>
-              <a:rPr lang="it-IT" dirty="0" err="1"/>
-              <a:t>Implementation</a:t>
-            </a:r>
-            <a:r>
-              <a:rPr lang="it-IT" dirty="0"/>
-              <a:t> plan</a:t>
+            <a:r>
+              <a:rPr lang="en-US" dirty="0"/>
+              <a:t>Sprint 1: Core Implementation &amp; Static Topology</a:t>
             </a:r>
           </a:p>
         </p:txBody>
@@ -11088,7 +11410,7 @@
         </p:spPr>
         <p:txBody>
           <a:bodyPr rtlCol="0">
-            <a:normAutofit fontScale="92500"/>
+            <a:normAutofit lnSpcReduction="10000"/>
           </a:bodyPr>
           <a:lstStyle>
             <a:defPPr>
@@ -11101,12 +11423,8 @@
               <a:buChar char="•"/>
             </a:pPr>
             <a:r>
-              <a:rPr lang="en-US" b="1" dirty="0"/>
-              <a:t>Audio Algorithm Update: </a:t>
-            </a:r>
-            <a:r>
               <a:rPr lang="en-US" dirty="0"/>
-              <a:t>Replaced the white noise concept with the Adaptive Masking Algorithm utilizing Pink or Brown noise for better acoustic masking.</a:t>
+              <a:t>Establish a static Master/Slave network topology.</a:t>
             </a:r>
           </a:p>
           <a:p>
@@ -11115,12 +11433,8 @@
               <a:buChar char="•"/>
             </a:pPr>
             <a:r>
-              <a:rPr lang="en-US" b="1" dirty="0"/>
-              <a:t>Feedback Loop Fix: </a:t>
-            </a:r>
-            <a:r>
               <a:rPr lang="en-US" dirty="0"/>
-              <a:t>Added the requirement for an Acoustic Echo Cancellation (AEC) DSP pipeline to prevent infinite positive feedback between the microphone and the transducer.</a:t>
+              <a:t>Implement Voice Activity Detection (VAD) on the Master node.</a:t>
             </a:r>
           </a:p>
           <a:p>
@@ -11129,12 +11443,8 @@
               <a:buChar char="•"/>
             </a:pPr>
             <a:r>
-              <a:rPr lang="en-US" b="1" dirty="0"/>
-              <a:t>Network Stability: </a:t>
-            </a:r>
-            <a:r>
               <a:rPr lang="en-US" dirty="0"/>
-              <a:t>Introduced hysteresis and threshold logic to the Dynamic Master-Slave election algorithm to prevent network thrashing when ambient noise fluctuates.</a:t>
+              <a:t>Enable basic Master-to-Slave command routing.</a:t>
             </a:r>
           </a:p>
           <a:p>
@@ -11143,12 +11453,8 @@
               <a:buChar char="•"/>
             </a:pPr>
             <a:r>
-              <a:rPr lang="en-US" b="1" dirty="0"/>
-              <a:t>Cloud Privacy Clarification: </a:t>
-            </a:r>
-            <a:r>
               <a:rPr lang="en-US" dirty="0"/>
-              <a:t>Explicitly stated in Sprint 2 that cloud telemetry only sends timestamps and activation states.</a:t>
+              <a:t>Implement the Adaptive Masking Algorithm: The system plays a targeted masking sound, scaling the output volume proportionally to the perceived input noise.</a:t>
             </a:r>
           </a:p>
           <a:p>
@@ -11157,14 +11463,19 @@
               <a:buChar char="•"/>
             </a:pPr>
             <a:r>
-              <a:rPr lang="en-US" b="1" dirty="0"/>
-              <a:t>Machine Learning Addition: </a:t>
-            </a:r>
-            <a:r>
               <a:rPr lang="en-US" dirty="0"/>
-              <a:t>Added a Sprint 3 requirement to implement an algorithm for recognizing and targeting power tool noise signatures.</a:t>
-            </a:r>
-            <a:endParaRPr lang="it-IT" dirty="0"/>
+              <a:t>Implement Acoustic Echo Cancellation (AEC) on all devices. This computationally subtracts the device's own emitted audio from the microphone's input stream to prevent infinite positive feedback loops.</a:t>
+            </a:r>
+          </a:p>
+          <a:p>
+            <a:pPr marL="342900" indent="-342900">
+              <a:buFont typeface="Arial" panose="020B0604020202020204" pitchFamily="34" charset="0"/>
+              <a:buChar char="•"/>
+            </a:pPr>
+            <a:r>
+              <a:rPr lang="en-US" dirty="0"/>
+              <a:t>Implement client acknowledgment (ACK) mechanisms.</a:t>
+            </a:r>
           </a:p>
         </p:txBody>
       </p:sp>
@@ -11182,6 +11493,514 @@
 </file>
 
 <file path=ppt/slides/slide7.xml><?xml version="1.0" encoding="utf-8"?>
+<p:sld xmlns:a="http://schemas.openxmlformats.org/drawingml/2006/main" xmlns:r="http://schemas.openxmlformats.org/officeDocument/2006/relationships" xmlns:p="http://schemas.openxmlformats.org/presentationml/2006/main">
+  <p:cSld>
+    <p:spTree>
+      <p:nvGrpSpPr>
+        <p:cNvPr id="1" name="">
+          <a:extLst>
+            <a:ext uri="{FF2B5EF4-FFF2-40B4-BE49-F238E27FC236}">
+              <a16:creationId xmlns:a16="http://schemas.microsoft.com/office/drawing/2014/main" id="{9E665D85-1FB9-EA42-FF37-016B83972956}"/>
+            </a:ext>
+          </a:extLst>
+        </p:cNvPr>
+        <p:cNvGrpSpPr/>
+        <p:nvPr/>
+      </p:nvGrpSpPr>
+      <p:grpSpPr>
+        <a:xfrm>
+          <a:off x="0" y="0"/>
+          <a:ext cx="0" cy="0"/>
+          <a:chOff x="0" y="0"/>
+          <a:chExt cx="0" cy="0"/>
+        </a:xfrm>
+      </p:grpSpPr>
+      <p:sp>
+        <p:nvSpPr>
+          <p:cNvPr id="2" name="Titolo 1">
+            <a:extLst>
+              <a:ext uri="{FF2B5EF4-FFF2-40B4-BE49-F238E27FC236}">
+                <a16:creationId xmlns:a16="http://schemas.microsoft.com/office/drawing/2014/main" id="{208AA900-9ACD-29AA-4B46-40A4F2CF850F}"/>
+              </a:ext>
+            </a:extLst>
+          </p:cNvPr>
+          <p:cNvSpPr>
+            <a:spLocks noGrp="1"/>
+          </p:cNvSpPr>
+          <p:nvPr>
+            <p:ph type="title"/>
+          </p:nvPr>
+        </p:nvSpPr>
+        <p:spPr>
+          <a:xfrm>
+            <a:off x="594360" y="278129"/>
+            <a:ext cx="9778365" cy="1494596"/>
+          </a:xfrm>
+        </p:spPr>
+        <p:txBody>
+          <a:bodyPr rtlCol="0"/>
+          <a:lstStyle>
+            <a:defPPr>
+              <a:defRPr lang="it-IT"/>
+            </a:defPPr>
+          </a:lstStyle>
+          <a:p>
+            <a:r>
+              <a:rPr lang="en-US" dirty="0"/>
+              <a:t>Sprint 2: Cloud Integration &amp; Dynamic Networking</a:t>
+            </a:r>
+          </a:p>
+        </p:txBody>
+      </p:sp>
+      <p:sp>
+        <p:nvSpPr>
+          <p:cNvPr id="3" name="Segnaposto contenuto 2">
+            <a:extLst>
+              <a:ext uri="{FF2B5EF4-FFF2-40B4-BE49-F238E27FC236}">
+                <a16:creationId xmlns:a16="http://schemas.microsoft.com/office/drawing/2014/main" id="{836E0CF1-285A-AFA9-ACE8-2C7044035007}"/>
+              </a:ext>
+            </a:extLst>
+          </p:cNvPr>
+          <p:cNvSpPr>
+            <a:spLocks noGrp="1"/>
+          </p:cNvSpPr>
+          <p:nvPr>
+            <p:ph sz="quarter" idx="15"/>
+          </p:nvPr>
+        </p:nvSpPr>
+        <p:spPr>
+          <a:xfrm>
+            <a:off x="594360" y="2676525"/>
+            <a:ext cx="9778365" cy="3597470"/>
+          </a:xfrm>
+        </p:spPr>
+        <p:txBody>
+          <a:bodyPr rtlCol="0">
+            <a:normAutofit/>
+          </a:bodyPr>
+          <a:lstStyle>
+            <a:defPPr>
+              <a:defRPr lang="it-IT"/>
+            </a:defPPr>
+          </a:lstStyle>
+          <a:p>
+            <a:pPr marL="342900" indent="-342900">
+              <a:buFont typeface="Arial" panose="020B0604020202020204" pitchFamily="34" charset="0"/>
+              <a:buChar char="•"/>
+            </a:pPr>
+            <a:r>
+              <a:rPr lang="it-IT" dirty="0"/>
+              <a:t>Integrate Cloud/MQTT </a:t>
+            </a:r>
+            <a:r>
+              <a:rPr lang="it-IT" dirty="0" err="1"/>
+              <a:t>functionalities</a:t>
+            </a:r>
+            <a:r>
+              <a:rPr lang="it-IT" dirty="0"/>
+              <a:t>: Devices report </a:t>
+            </a:r>
+            <a:r>
+              <a:rPr lang="it-IT" dirty="0" err="1"/>
+              <a:t>telemetry</a:t>
+            </a:r>
+            <a:r>
+              <a:rPr lang="it-IT" dirty="0"/>
+              <a:t> data (</a:t>
+            </a:r>
+            <a:r>
+              <a:rPr lang="it-IT" dirty="0" err="1"/>
+              <a:t>battery</a:t>
+            </a:r>
+            <a:r>
+              <a:rPr lang="it-IT" dirty="0"/>
+              <a:t> life, connection </a:t>
+            </a:r>
+            <a:r>
+              <a:rPr lang="it-IT" dirty="0" err="1"/>
+              <a:t>strength</a:t>
+            </a:r>
+            <a:r>
+              <a:rPr lang="it-IT" dirty="0"/>
+              <a:t>, </a:t>
+            </a:r>
+            <a:r>
+              <a:rPr lang="it-IT" dirty="0" err="1"/>
+              <a:t>uptime</a:t>
+            </a:r>
+            <a:r>
+              <a:rPr lang="it-IT" dirty="0"/>
+              <a:t>, etc.).</a:t>
+            </a:r>
+          </a:p>
+          <a:p>
+            <a:pPr marL="342900" indent="-342900">
+              <a:buFont typeface="Arial" panose="020B0604020202020204" pitchFamily="34" charset="0"/>
+              <a:buChar char="•"/>
+            </a:pPr>
+            <a:r>
+              <a:rPr lang="it-IT" dirty="0"/>
+              <a:t>The Master </a:t>
+            </a:r>
+            <a:r>
+              <a:rPr lang="it-IT" dirty="0" err="1"/>
+              <a:t>node</a:t>
+            </a:r>
+            <a:r>
+              <a:rPr lang="it-IT" dirty="0"/>
+              <a:t> handles </a:t>
+            </a:r>
+            <a:r>
+              <a:rPr lang="it-IT" dirty="0" err="1"/>
+              <a:t>all</a:t>
+            </a:r>
+            <a:r>
+              <a:rPr lang="it-IT" dirty="0"/>
+              <a:t> </a:t>
+            </a:r>
+            <a:r>
+              <a:rPr lang="it-IT" dirty="0" err="1"/>
+              <a:t>outbound</a:t>
+            </a:r>
+            <a:r>
+              <a:rPr lang="it-IT" dirty="0"/>
+              <a:t> cloud </a:t>
+            </a:r>
+            <a:r>
+              <a:rPr lang="it-IT" dirty="0" err="1"/>
+              <a:t>communication</a:t>
+            </a:r>
+            <a:r>
+              <a:rPr lang="it-IT" dirty="0"/>
+              <a:t>.</a:t>
+            </a:r>
+          </a:p>
+          <a:p>
+            <a:pPr marL="342900" indent="-342900">
+              <a:buFont typeface="Arial" panose="020B0604020202020204" pitchFamily="34" charset="0"/>
+              <a:buChar char="•"/>
+            </a:pPr>
+            <a:r>
+              <a:rPr lang="it-IT" dirty="0"/>
+              <a:t>Cloud </a:t>
+            </a:r>
+            <a:r>
+              <a:rPr lang="it-IT" dirty="0" err="1"/>
+              <a:t>Telemetry</a:t>
+            </a:r>
+            <a:r>
+              <a:rPr lang="it-IT" dirty="0"/>
+              <a:t>: Devices </a:t>
+            </a:r>
+            <a:r>
+              <a:rPr lang="it-IT" dirty="0" err="1"/>
+              <a:t>send</a:t>
+            </a:r>
+            <a:r>
+              <a:rPr lang="it-IT" dirty="0"/>
+              <a:t> </a:t>
+            </a:r>
+            <a:r>
+              <a:rPr lang="it-IT" dirty="0" err="1"/>
+              <a:t>specific</a:t>
+            </a:r>
+            <a:r>
+              <a:rPr lang="it-IT" dirty="0"/>
+              <a:t> </a:t>
+            </a:r>
+            <a:r>
+              <a:rPr lang="it-IT" dirty="0" err="1"/>
+              <a:t>operational</a:t>
+            </a:r>
+            <a:r>
+              <a:rPr lang="it-IT" dirty="0"/>
+              <a:t> data to the cloud for </a:t>
+            </a:r>
+            <a:r>
+              <a:rPr lang="it-IT" dirty="0" err="1"/>
+              <a:t>historical</a:t>
+            </a:r>
+            <a:r>
+              <a:rPr lang="it-IT" dirty="0"/>
+              <a:t> tracking, </a:t>
+            </a:r>
+            <a:r>
+              <a:rPr lang="it-IT" dirty="0" err="1"/>
+              <a:t>including</a:t>
+            </a:r>
+            <a:r>
+              <a:rPr lang="it-IT" dirty="0"/>
+              <a:t> precise </a:t>
+            </a:r>
+            <a:r>
+              <a:rPr lang="it-IT" dirty="0" err="1"/>
+              <a:t>timestamps</a:t>
+            </a:r>
+            <a:r>
+              <a:rPr lang="it-IT" dirty="0"/>
+              <a:t> and the </a:t>
+            </a:r>
+            <a:r>
+              <a:rPr lang="it-IT" dirty="0" err="1"/>
+              <a:t>current</a:t>
+            </a:r>
+            <a:r>
+              <a:rPr lang="it-IT" dirty="0"/>
+              <a:t> speech/</a:t>
+            </a:r>
+            <a:r>
+              <a:rPr lang="it-IT" dirty="0" err="1"/>
+              <a:t>noise</a:t>
+            </a:r>
+            <a:r>
+              <a:rPr lang="it-IT" dirty="0"/>
+              <a:t> </a:t>
+            </a:r>
+            <a:r>
+              <a:rPr lang="it-IT" dirty="0" err="1"/>
+              <a:t>activation</a:t>
+            </a:r>
+            <a:r>
+              <a:rPr lang="it-IT" dirty="0"/>
+              <a:t> </a:t>
+            </a:r>
+            <a:r>
+              <a:rPr lang="it-IT" dirty="0" err="1"/>
+              <a:t>states</a:t>
+            </a:r>
+            <a:r>
+              <a:rPr lang="it-IT" dirty="0"/>
+              <a:t>.</a:t>
+            </a:r>
+          </a:p>
+          <a:p>
+            <a:pPr marL="342900" indent="-342900">
+              <a:buFont typeface="Arial" panose="020B0604020202020204" pitchFamily="34" charset="0"/>
+              <a:buChar char="•"/>
+            </a:pPr>
+            <a:r>
+              <a:rPr lang="it-IT" dirty="0" err="1"/>
+              <a:t>Implement</a:t>
+            </a:r>
+            <a:r>
+              <a:rPr lang="it-IT" dirty="0"/>
+              <a:t> a Dynamic Master/Slave </a:t>
+            </a:r>
+            <a:r>
+              <a:rPr lang="it-IT" dirty="0" err="1"/>
+              <a:t>election</a:t>
+            </a:r>
+            <a:r>
+              <a:rPr lang="it-IT" dirty="0"/>
+              <a:t> </a:t>
+            </a:r>
+            <a:r>
+              <a:rPr lang="it-IT" dirty="0" err="1"/>
+              <a:t>algorithm</a:t>
+            </a:r>
+            <a:r>
+              <a:rPr lang="it-IT" dirty="0"/>
+              <a:t> (</a:t>
+            </a:r>
+            <a:r>
+              <a:rPr lang="it-IT" dirty="0" err="1"/>
+              <a:t>detailed</a:t>
+            </a:r>
+            <a:r>
+              <a:rPr lang="it-IT" dirty="0"/>
+              <a:t> </a:t>
+            </a:r>
+            <a:r>
+              <a:rPr lang="it-IT" dirty="0" err="1"/>
+              <a:t>below</a:t>
+            </a:r>
+            <a:r>
+              <a:rPr lang="it-IT" dirty="0"/>
+              <a:t>).</a:t>
+            </a:r>
+          </a:p>
+          <a:p>
+            <a:pPr marL="342900" indent="-342900">
+              <a:buFont typeface="Arial" panose="020B0604020202020204" pitchFamily="34" charset="0"/>
+              <a:buChar char="•"/>
+            </a:pPr>
+            <a:r>
+              <a:rPr lang="it-IT" dirty="0" err="1"/>
+              <a:t>Develop</a:t>
+            </a:r>
+            <a:r>
+              <a:rPr lang="it-IT" dirty="0"/>
+              <a:t> a Web Application for remote control (e.g., muting </a:t>
+            </a:r>
+            <a:r>
+              <a:rPr lang="it-IT" dirty="0" err="1"/>
+              <a:t>individual</a:t>
+            </a:r>
+            <a:r>
+              <a:rPr lang="it-IT" dirty="0"/>
+              <a:t> followers) and </a:t>
+            </a:r>
+            <a:r>
+              <a:rPr lang="it-IT" dirty="0" err="1"/>
+              <a:t>statistical</a:t>
+            </a:r>
+            <a:r>
+              <a:rPr lang="it-IT" dirty="0"/>
+              <a:t> monitoring.</a:t>
+            </a:r>
+          </a:p>
+        </p:txBody>
+      </p:sp>
+    </p:spTree>
+    <p:extLst>
+      <p:ext uri="{BB962C8B-B14F-4D97-AF65-F5344CB8AC3E}">
+        <p14:creationId xmlns:p14="http://schemas.microsoft.com/office/powerpoint/2010/main" val="1840873918"/>
+      </p:ext>
+    </p:extLst>
+  </p:cSld>
+  <p:clrMapOvr>
+    <a:masterClrMapping/>
+  </p:clrMapOvr>
+</p:sld>
+</file>
+
+<file path=ppt/slides/slide8.xml><?xml version="1.0" encoding="utf-8"?>
+<p:sld xmlns:a="http://schemas.openxmlformats.org/drawingml/2006/main" xmlns:r="http://schemas.openxmlformats.org/officeDocument/2006/relationships" xmlns:p="http://schemas.openxmlformats.org/presentationml/2006/main">
+  <p:cSld>
+    <p:spTree>
+      <p:nvGrpSpPr>
+        <p:cNvPr id="1" name="">
+          <a:extLst>
+            <a:ext uri="{FF2B5EF4-FFF2-40B4-BE49-F238E27FC236}">
+              <a16:creationId xmlns:a16="http://schemas.microsoft.com/office/drawing/2014/main" id="{E33E72E3-DDFA-5550-6F3B-E0F8CCB89EDB}"/>
+            </a:ext>
+          </a:extLst>
+        </p:cNvPr>
+        <p:cNvGrpSpPr/>
+        <p:nvPr/>
+      </p:nvGrpSpPr>
+      <p:grpSpPr>
+        <a:xfrm>
+          <a:off x="0" y="0"/>
+          <a:ext cx="0" cy="0"/>
+          <a:chOff x="0" y="0"/>
+          <a:chExt cx="0" cy="0"/>
+        </a:xfrm>
+      </p:grpSpPr>
+      <p:sp>
+        <p:nvSpPr>
+          <p:cNvPr id="2" name="Titolo 1">
+            <a:extLst>
+              <a:ext uri="{FF2B5EF4-FFF2-40B4-BE49-F238E27FC236}">
+                <a16:creationId xmlns:a16="http://schemas.microsoft.com/office/drawing/2014/main" id="{39321A3D-2A24-CAF6-7771-C5FFB800904E}"/>
+              </a:ext>
+            </a:extLst>
+          </p:cNvPr>
+          <p:cNvSpPr>
+            <a:spLocks noGrp="1"/>
+          </p:cNvSpPr>
+          <p:nvPr>
+            <p:ph type="title"/>
+          </p:nvPr>
+        </p:nvSpPr>
+        <p:spPr>
+          <a:xfrm>
+            <a:off x="594360" y="278129"/>
+            <a:ext cx="9778365" cy="1494596"/>
+          </a:xfrm>
+        </p:spPr>
+        <p:txBody>
+          <a:bodyPr rtlCol="0"/>
+          <a:lstStyle>
+            <a:defPPr>
+              <a:defRPr lang="it-IT"/>
+            </a:defPPr>
+          </a:lstStyle>
+          <a:p>
+            <a:r>
+              <a:rPr lang="en-US" dirty="0"/>
+              <a:t>Sprint 3: Advanced Audio &amp; Hardware Finalization</a:t>
+            </a:r>
+          </a:p>
+        </p:txBody>
+      </p:sp>
+      <p:sp>
+        <p:nvSpPr>
+          <p:cNvPr id="3" name="Segnaposto contenuto 2">
+            <a:extLst>
+              <a:ext uri="{FF2B5EF4-FFF2-40B4-BE49-F238E27FC236}">
+                <a16:creationId xmlns:a16="http://schemas.microsoft.com/office/drawing/2014/main" id="{C912B1A0-3FB1-861F-4DD8-0A579DD67FC2}"/>
+              </a:ext>
+            </a:extLst>
+          </p:cNvPr>
+          <p:cNvSpPr>
+            <a:spLocks noGrp="1"/>
+          </p:cNvSpPr>
+          <p:nvPr>
+            <p:ph sz="quarter" idx="15"/>
+          </p:nvPr>
+        </p:nvSpPr>
+        <p:spPr>
+          <a:xfrm>
+            <a:off x="594360" y="2676525"/>
+            <a:ext cx="9778365" cy="3597470"/>
+          </a:xfrm>
+        </p:spPr>
+        <p:txBody>
+          <a:bodyPr rtlCol="0">
+            <a:normAutofit/>
+          </a:bodyPr>
+          <a:lstStyle>
+            <a:defPPr>
+              <a:defRPr lang="it-IT"/>
+            </a:defPPr>
+          </a:lstStyle>
+          <a:p>
+            <a:pPr marL="342900" indent="-342900">
+              <a:buFont typeface="Arial" panose="020B0604020202020204" pitchFamily="34" charset="0"/>
+              <a:buChar char="•"/>
+            </a:pPr>
+            <a:r>
+              <a:rPr lang="en-US" dirty="0"/>
+              <a:t>Upgrade the Adaptive Masking Algorithm to dynamically select and play different types of masking sounds based on the specific acoustic environment.</a:t>
+            </a:r>
+          </a:p>
+          <a:p>
+            <a:pPr marL="342900" indent="-342900">
+              <a:buFont typeface="Arial" panose="020B0604020202020204" pitchFamily="34" charset="0"/>
+              <a:buChar char="•"/>
+            </a:pPr>
+            <a:r>
+              <a:rPr lang="en-US" dirty="0"/>
+              <a:t>Acoustic Profile Classification: Implement Machine Learning models to recognize the specific audio signatures of power tools and working machinery, allowing the system to deploy targeted masking sounds for those specific disturbances.</a:t>
+            </a:r>
+          </a:p>
+          <a:p>
+            <a:pPr marL="342900" indent="-342900">
+              <a:buFont typeface="Arial" panose="020B0604020202020204" pitchFamily="34" charset="0"/>
+              <a:buChar char="•"/>
+            </a:pPr>
+            <a:r>
+              <a:rPr lang="en-US" dirty="0"/>
+              <a:t>Design and 3D print custom enclosures for the hardware, ensuring proper physical acoustic isolation between the microphone and the transducer.</a:t>
+            </a:r>
+          </a:p>
+        </p:txBody>
+      </p:sp>
+    </p:spTree>
+    <p:extLst>
+      <p:ext uri="{BB962C8B-B14F-4D97-AF65-F5344CB8AC3E}">
+        <p14:creationId xmlns:p14="http://schemas.microsoft.com/office/powerpoint/2010/main" val="859078147"/>
+      </p:ext>
+    </p:extLst>
+  </p:cSld>
+  <p:clrMapOvr>
+    <a:masterClrMapping/>
+  </p:clrMapOvr>
+</p:sld>
+</file>
+
+<file path=ppt/slides/slide9.xml><?xml version="1.0" encoding="utf-8"?>
 <p:sld xmlns:a="http://schemas.openxmlformats.org/drawingml/2006/main" xmlns:r="http://schemas.openxmlformats.org/officeDocument/2006/relationships" xmlns:p="http://schemas.openxmlformats.org/presentationml/2006/main">
   <p:cSld>
     <p:spTree>
@@ -11553,95 +12372,6 @@
     <p:extLst>
       <p:ext uri="{BB962C8B-B14F-4D97-AF65-F5344CB8AC3E}">
         <p14:creationId xmlns:p14="http://schemas.microsoft.com/office/powerpoint/2010/main" val="298364507"/>
-      </p:ext>
-    </p:extLst>
-  </p:cSld>
-  <p:clrMapOvr>
-    <a:masterClrMapping/>
-  </p:clrMapOvr>
-</p:sld>
-</file>
-
-<file path=ppt/slides/slide8.xml><?xml version="1.0" encoding="utf-8"?>
-<p:sld xmlns:a="http://schemas.openxmlformats.org/drawingml/2006/main" xmlns:r="http://schemas.openxmlformats.org/officeDocument/2006/relationships" xmlns:p="http://schemas.openxmlformats.org/presentationml/2006/main">
-  <p:cSld>
-    <p:spTree>
-      <p:nvGrpSpPr>
-        <p:cNvPr id="1" name=""/>
-        <p:cNvGrpSpPr/>
-        <p:nvPr/>
-      </p:nvGrpSpPr>
-      <p:grpSpPr>
-        <a:xfrm>
-          <a:off x="0" y="0"/>
-          <a:ext cx="0" cy="0"/>
-          <a:chOff x="0" y="0"/>
-          <a:chExt cx="0" cy="0"/>
-        </a:xfrm>
-      </p:grpSpPr>
-      <p:sp>
-        <p:nvSpPr>
-          <p:cNvPr id="2" name="Titolo 1">
-            <a:extLst>
-              <a:ext uri="{FF2B5EF4-FFF2-40B4-BE49-F238E27FC236}">
-                <a16:creationId xmlns:a16="http://schemas.microsoft.com/office/drawing/2014/main" id="{F810C1B7-6E4E-3DEE-50C0-1CA3B14303EE}"/>
-              </a:ext>
-            </a:extLst>
-          </p:cNvPr>
-          <p:cNvSpPr>
-            <a:spLocks noGrp="1"/>
-          </p:cNvSpPr>
-          <p:nvPr>
-            <p:ph type="ctrTitle"/>
-          </p:nvPr>
-        </p:nvSpPr>
-        <p:spPr>
-          <a:xfrm>
-            <a:off x="594360" y="411479"/>
-            <a:ext cx="5486400" cy="3291840"/>
-          </a:xfrm>
-        </p:spPr>
-        <p:txBody>
-          <a:bodyPr rtlCol="0"/>
-          <a:lstStyle>
-            <a:defPPr>
-              <a:defRPr lang="it-IT"/>
-            </a:defPPr>
-          </a:lstStyle>
-          <a:p>
-            <a:pPr rtl="0"/>
-            <a:r>
-              <a:rPr lang="it-IT" dirty="0"/>
-              <a:t>Thank </a:t>
-            </a:r>
-            <a:r>
-              <a:rPr lang="it-IT" dirty="0" err="1"/>
-              <a:t>you</a:t>
-            </a:r>
-            <a:r>
-              <a:rPr lang="it-IT" dirty="0"/>
-              <a:t> for </a:t>
-            </a:r>
-            <a:r>
-              <a:rPr lang="it-IT" dirty="0" err="1"/>
-              <a:t>your</a:t>
-            </a:r>
-            <a:r>
-              <a:rPr lang="it-IT" dirty="0"/>
-              <a:t> </a:t>
-            </a:r>
-            <a:r>
-              <a:rPr lang="it-IT" dirty="0" err="1"/>
-              <a:t>attention</a:t>
-            </a:r>
-            <a:endParaRPr lang="it-IT" dirty="0"/>
-          </a:p>
-        </p:txBody>
-      </p:sp>
-    </p:spTree>
-    <p:extLst>
-      <p:ext uri="{BB962C8B-B14F-4D97-AF65-F5344CB8AC3E}">
-        <p14:creationId xmlns:p14="http://schemas.microsoft.com/office/powerpoint/2010/main" val="4261132419"/>
       </p:ext>
     </p:extLst>
   </p:cSld>
@@ -12443,6 +13173,35 @@
 </file>
 
 <file path=customXml/item1.xml><?xml version="1.0" encoding="utf-8"?>
+<?mso-contentType ?>
+<FormTemplates xmlns="http://schemas.microsoft.com/sharepoint/v3/contenttype/forms">
+  <Display>DocumentLibraryForm</Display>
+  <Edit>DocumentLibraryForm</Edit>
+  <New>DocumentLibraryForm</New>
+</FormTemplates>
+</file>
+
+<file path=customXml/item2.xml><?xml version="1.0" encoding="utf-8"?>
+<p:properties xmlns:p="http://schemas.microsoft.com/office/2006/metadata/properties" xmlns:xsi="http://www.w3.org/2001/XMLSchema-instance" xmlns:pc="http://schemas.microsoft.com/office/infopath/2007/PartnerControls">
+  <documentManagement>
+    <Background xmlns="71af3243-3dd4-4a8d-8c0d-dd76da1f02a5">false</Background>
+    <Status xmlns="71af3243-3dd4-4a8d-8c0d-dd76da1f02a5">Not started</Status>
+    <_ip_UnifiedCompliancePolicyUIAction xmlns="http://schemas.microsoft.com/sharepoint/v3" xsi:nil="true"/>
+    <Image xmlns="71af3243-3dd4-4a8d-8c0d-dd76da1f02a5">
+      <Url xsi:nil="true"/>
+      <Description xsi:nil="true"/>
+    </Image>
+    <_ip_UnifiedCompliancePolicyProperties xmlns="http://schemas.microsoft.com/sharepoint/v3" xsi:nil="true"/>
+    <ImageTagsTaxHTField xmlns="71af3243-3dd4-4a8d-8c0d-dd76da1f02a5">
+      <Terms xmlns="http://schemas.microsoft.com/office/infopath/2007/PartnerControls"/>
+    </ImageTagsTaxHTField>
+    <TaxCatchAll xmlns="230e9df3-be65-4c73-a93b-d1236ebd677e" xsi:nil="true"/>
+    <MediaServiceKeyPoints xmlns="71af3243-3dd4-4a8d-8c0d-dd76da1f02a5" xsi:nil="true"/>
+  </documentManagement>
+</p:properties>
+</file>
+
+<file path=customXml/item3.xml><?xml version="1.0" encoding="utf-8"?>
 <ct:contentTypeSchema xmlns:ct="http://schemas.microsoft.com/office/2006/metadata/contentType" xmlns:ma="http://schemas.microsoft.com/office/2006/metadata/properties/metaAttributes" ct:_="" ma:_="" ma:contentTypeName="Document" ma:contentTypeID="0x01010079F111ED35F8CC479449609E8A0923A6" ma:contentTypeVersion="28" ma:contentTypeDescription="Create a new document." ma:contentTypeScope="" ma:versionID="60f5a4f2d2b0abadcf532d48ebf9cb71">
   <xsd:schema xmlns:xsd="http://www.w3.org/2001/XMLSchema" xmlns:xs="http://www.w3.org/2001/XMLSchema" xmlns:p="http://schemas.microsoft.com/office/2006/metadata/properties" xmlns:ns1="http://schemas.microsoft.com/sharepoint/v3" xmlns:ns2="71af3243-3dd4-4a8d-8c0d-dd76da1f02a5" xmlns:ns3="16c05727-aa75-4e4a-9b5f-8a80a1165891" xmlns:ns4="230e9df3-be65-4c73-a93b-d1236ebd677e" targetNamespace="http://schemas.microsoft.com/office/2006/metadata/properties" ma:root="true" ma:fieldsID="7dd78129e6a1811f84807ad11c651531" ns1:_="" ns2:_="" ns3:_="" ns4:_="">
     <xsd:import namespace="http://schemas.microsoft.com/sharepoint/v3"/>
@@ -12754,36 +13513,27 @@
 </ct:contentTypeSchema>
 </file>
 
-<file path=customXml/item2.xml><?xml version="1.0" encoding="utf-8"?>
-<p:properties xmlns:p="http://schemas.microsoft.com/office/2006/metadata/properties" xmlns:xsi="http://www.w3.org/2001/XMLSchema-instance" xmlns:pc="http://schemas.microsoft.com/office/infopath/2007/PartnerControls">
-  <documentManagement>
-    <Background xmlns="71af3243-3dd4-4a8d-8c0d-dd76da1f02a5">false</Background>
-    <Status xmlns="71af3243-3dd4-4a8d-8c0d-dd76da1f02a5">Not started</Status>
-    <_ip_UnifiedCompliancePolicyUIAction xmlns="http://schemas.microsoft.com/sharepoint/v3" xsi:nil="true"/>
-    <Image xmlns="71af3243-3dd4-4a8d-8c0d-dd76da1f02a5">
-      <Url xsi:nil="true"/>
-      <Description xsi:nil="true"/>
-    </Image>
-    <_ip_UnifiedCompliancePolicyProperties xmlns="http://schemas.microsoft.com/sharepoint/v3" xsi:nil="true"/>
-    <ImageTagsTaxHTField xmlns="71af3243-3dd4-4a8d-8c0d-dd76da1f02a5">
-      <Terms xmlns="http://schemas.microsoft.com/office/infopath/2007/PartnerControls"/>
-    </ImageTagsTaxHTField>
-    <TaxCatchAll xmlns="230e9df3-be65-4c73-a93b-d1236ebd677e" xsi:nil="true"/>
-    <MediaServiceKeyPoints xmlns="71af3243-3dd4-4a8d-8c0d-dd76da1f02a5" xsi:nil="true"/>
-  </documentManagement>
-</p:properties>
+<file path=customXml/itemProps1.xml><?xml version="1.0" encoding="utf-8"?>
+<ds:datastoreItem xmlns:ds="http://schemas.openxmlformats.org/officeDocument/2006/customXml" ds:itemID="{C21FFAC0-05A2-416A-B06C-C248395482CF}">
+  <ds:schemaRefs>
+    <ds:schemaRef ds:uri="http://schemas.microsoft.com/sharepoint/v3/contenttype/forms"/>
+  </ds:schemaRefs>
+</ds:datastoreItem>
 </file>
 
-<file path=customXml/item3.xml><?xml version="1.0" encoding="utf-8"?>
-<?mso-contentType ?>
-<FormTemplates xmlns="http://schemas.microsoft.com/sharepoint/v3/contenttype/forms">
-  <Display>DocumentLibraryForm</Display>
-  <Edit>DocumentLibraryForm</Edit>
-  <New>DocumentLibraryForm</New>
-</FormTemplates>
+<file path=customXml/itemProps2.xml><?xml version="1.0" encoding="utf-8"?>
+<ds:datastoreItem xmlns:ds="http://schemas.openxmlformats.org/officeDocument/2006/customXml" ds:itemID="{4F4B194E-8B30-4377-8C59-ECFB902D2A26}">
+  <ds:schemaRefs>
+    <ds:schemaRef ds:uri="http://schemas.microsoft.com/office/2006/metadata/properties"/>
+    <ds:schemaRef ds:uri="http://schemas.microsoft.com/office/infopath/2007/PartnerControls"/>
+    <ds:schemaRef ds:uri="71af3243-3dd4-4a8d-8c0d-dd76da1f02a5"/>
+    <ds:schemaRef ds:uri="http://schemas.microsoft.com/sharepoint/v3"/>
+    <ds:schemaRef ds:uri="230e9df3-be65-4c73-a93b-d1236ebd677e"/>
+  </ds:schemaRefs>
+</ds:datastoreItem>
 </file>
 
-<file path=customXml/itemProps1.xml><?xml version="1.0" encoding="utf-8"?>
+<file path=customXml/itemProps3.xml><?xml version="1.0" encoding="utf-8"?>
 <ds:datastoreItem xmlns:ds="http://schemas.openxmlformats.org/officeDocument/2006/customXml" ds:itemID="{92DB9E12-8AC3-4138-BF4D-720A5525AB10}">
   <ds:schemaRefs>
     <ds:schemaRef ds:uri="http://schemas.microsoft.com/office/2006/metadata/contentType"/>
@@ -12804,26 +13554,6 @@
 </ds:datastoreItem>
 </file>
 
-<file path=customXml/itemProps2.xml><?xml version="1.0" encoding="utf-8"?>
-<ds:datastoreItem xmlns:ds="http://schemas.openxmlformats.org/officeDocument/2006/customXml" ds:itemID="{4F4B194E-8B30-4377-8C59-ECFB902D2A26}">
-  <ds:schemaRefs>
-    <ds:schemaRef ds:uri="http://schemas.microsoft.com/office/2006/metadata/properties"/>
-    <ds:schemaRef ds:uri="http://schemas.microsoft.com/office/infopath/2007/PartnerControls"/>
-    <ds:schemaRef ds:uri="71af3243-3dd4-4a8d-8c0d-dd76da1f02a5"/>
-    <ds:schemaRef ds:uri="http://schemas.microsoft.com/sharepoint/v3"/>
-    <ds:schemaRef ds:uri="230e9df3-be65-4c73-a93b-d1236ebd677e"/>
-  </ds:schemaRefs>
-</ds:datastoreItem>
-</file>
-
-<file path=customXml/itemProps3.xml><?xml version="1.0" encoding="utf-8"?>
-<ds:datastoreItem xmlns:ds="http://schemas.openxmlformats.org/officeDocument/2006/customXml" ds:itemID="{C21FFAC0-05A2-416A-B06C-C248395482CF}">
-  <ds:schemaRefs>
-    <ds:schemaRef ds:uri="http://schemas.microsoft.com/sharepoint/v3/contenttype/forms"/>
-  </ds:schemaRefs>
-</ds:datastoreItem>
-</file>
-
 <file path=docMetadata/LabelInfo.xml><?xml version="1.0" encoding="utf-8"?>
 <clbl:labelList xmlns:clbl="http://schemas.microsoft.com/office/2020/mipLabelMetadata"/>
 </file>